--- a/2026/0415_consultation/심리상담사 목록.pptx
+++ b/2026/0415_consultation/심리상담사 목록.pptx
@@ -8,6 +8,7 @@
     <p:sldId id="256" r:id="rId2"/>
     <p:sldId id="257" r:id="rId3"/>
     <p:sldId id="258" r:id="rId4"/>
+    <p:sldId id="259" r:id="rId5"/>
   </p:sldIdLst>
   <p:sldSz cx="12192000" cy="6858000"/>
   <p:notesSz cx="6858000" cy="9144000"/>
@@ -106,6 +107,35 @@
       </a:defRPr>
     </a:lvl9pPr>
   </p:defaultTextStyle>
+  <p:extLst>
+    <p:ext uri="{521415D9-36F7-43E2-AB2F-B90AF26B5E84}">
+      <p14:sectionLst xmlns:p14="http://schemas.microsoft.com/office/powerpoint/2010/main">
+        <p14:section name="도봉구" id="{E807F8F3-0950-405C-81D9-27B58D81BEB5}">
+          <p14:sldIdLst>
+            <p14:sldId id="256"/>
+          </p14:sldIdLst>
+        </p14:section>
+        <p14:section name="강북구" id="{F1DBAE42-90F8-40DF-86C9-59323C801FCE}">
+          <p14:sldIdLst>
+            <p14:sldId id="257"/>
+          </p14:sldIdLst>
+        </p14:section>
+        <p14:section name="노원구" id="{0A817A68-21D2-42A3-9753-2DB60E1A70CC}">
+          <p14:sldIdLst>
+            <p14:sldId id="258"/>
+          </p14:sldIdLst>
+        </p14:section>
+        <p14:section name="중구" id="{6B1BEFA8-9AAB-4E84-B342-70C92C2F693E}">
+          <p14:sldIdLst>
+            <p14:sldId id="259"/>
+          </p14:sldIdLst>
+        </p14:section>
+      </p14:sectionLst>
+    </p:ext>
+    <p:ext uri="{EFAFB233-063F-42B5-8137-9DF3F51BA10A}">
+      <p15:sldGuideLst xmlns:p15="http://schemas.microsoft.com/office/powerpoint/2012/main"/>
+    </p:ext>
+  </p:extLst>
 </p:presentation>
 </file>
 
@@ -256,7 +286,7 @@
           <a:p>
             <a:fld id="{A770119C-D353-493B-BFEC-4985FC389F40}" type="datetimeFigureOut">
               <a:rPr lang="ko-KR" altLang="en-US" smtClean="0"/>
-              <a:t>2026-04-15</a:t>
+              <a:t>2026-04-17</a:t>
             </a:fld>
             <a:endParaRPr lang="ko-KR" altLang="en-US"/>
           </a:p>
@@ -454,7 +484,7 @@
           <a:p>
             <a:fld id="{A770119C-D353-493B-BFEC-4985FC389F40}" type="datetimeFigureOut">
               <a:rPr lang="ko-KR" altLang="en-US" smtClean="0"/>
-              <a:t>2026-04-15</a:t>
+              <a:t>2026-04-17</a:t>
             </a:fld>
             <a:endParaRPr lang="ko-KR" altLang="en-US"/>
           </a:p>
@@ -662,7 +692,7 @@
           <a:p>
             <a:fld id="{A770119C-D353-493B-BFEC-4985FC389F40}" type="datetimeFigureOut">
               <a:rPr lang="ko-KR" altLang="en-US" smtClean="0"/>
-              <a:t>2026-04-15</a:t>
+              <a:t>2026-04-17</a:t>
             </a:fld>
             <a:endParaRPr lang="ko-KR" altLang="en-US"/>
           </a:p>
@@ -860,7 +890,7 @@
           <a:p>
             <a:fld id="{A770119C-D353-493B-BFEC-4985FC389F40}" type="datetimeFigureOut">
               <a:rPr lang="ko-KR" altLang="en-US" smtClean="0"/>
-              <a:t>2026-04-15</a:t>
+              <a:t>2026-04-17</a:t>
             </a:fld>
             <a:endParaRPr lang="ko-KR" altLang="en-US"/>
           </a:p>
@@ -1135,7 +1165,7 @@
           <a:p>
             <a:fld id="{A770119C-D353-493B-BFEC-4985FC389F40}" type="datetimeFigureOut">
               <a:rPr lang="ko-KR" altLang="en-US" smtClean="0"/>
-              <a:t>2026-04-15</a:t>
+              <a:t>2026-04-17</a:t>
             </a:fld>
             <a:endParaRPr lang="ko-KR" altLang="en-US"/>
           </a:p>
@@ -1400,7 +1430,7 @@
           <a:p>
             <a:fld id="{A770119C-D353-493B-BFEC-4985FC389F40}" type="datetimeFigureOut">
               <a:rPr lang="ko-KR" altLang="en-US" smtClean="0"/>
-              <a:t>2026-04-15</a:t>
+              <a:t>2026-04-17</a:t>
             </a:fld>
             <a:endParaRPr lang="ko-KR" altLang="en-US"/>
           </a:p>
@@ -1812,7 +1842,7 @@
           <a:p>
             <a:fld id="{A770119C-D353-493B-BFEC-4985FC389F40}" type="datetimeFigureOut">
               <a:rPr lang="ko-KR" altLang="en-US" smtClean="0"/>
-              <a:t>2026-04-15</a:t>
+              <a:t>2026-04-17</a:t>
             </a:fld>
             <a:endParaRPr lang="ko-KR" altLang="en-US"/>
           </a:p>
@@ -1953,7 +1983,7 @@
           <a:p>
             <a:fld id="{A770119C-D353-493B-BFEC-4985FC389F40}" type="datetimeFigureOut">
               <a:rPr lang="ko-KR" altLang="en-US" smtClean="0"/>
-              <a:t>2026-04-15</a:t>
+              <a:t>2026-04-17</a:t>
             </a:fld>
             <a:endParaRPr lang="ko-KR" altLang="en-US"/>
           </a:p>
@@ -2066,7 +2096,7 @@
           <a:p>
             <a:fld id="{A770119C-D353-493B-BFEC-4985FC389F40}" type="datetimeFigureOut">
               <a:rPr lang="ko-KR" altLang="en-US" smtClean="0"/>
-              <a:t>2026-04-15</a:t>
+              <a:t>2026-04-17</a:t>
             </a:fld>
             <a:endParaRPr lang="ko-KR" altLang="en-US"/>
           </a:p>
@@ -2377,7 +2407,7 @@
           <a:p>
             <a:fld id="{A770119C-D353-493B-BFEC-4985FC389F40}" type="datetimeFigureOut">
               <a:rPr lang="ko-KR" altLang="en-US" smtClean="0"/>
-              <a:t>2026-04-15</a:t>
+              <a:t>2026-04-17</a:t>
             </a:fld>
             <a:endParaRPr lang="ko-KR" altLang="en-US"/>
           </a:p>
@@ -2665,7 +2695,7 @@
           <a:p>
             <a:fld id="{A770119C-D353-493B-BFEC-4985FC389F40}" type="datetimeFigureOut">
               <a:rPr lang="ko-KR" altLang="en-US" smtClean="0"/>
-              <a:t>2026-04-15</a:t>
+              <a:t>2026-04-17</a:t>
             </a:fld>
             <a:endParaRPr lang="ko-KR" altLang="en-US"/>
           </a:p>
@@ -2906,7 +2936,7 @@
           <a:p>
             <a:fld id="{A770119C-D353-493B-BFEC-4985FC389F40}" type="datetimeFigureOut">
               <a:rPr lang="ko-KR" altLang="en-US" smtClean="0"/>
-              <a:t>2026-04-15</a:t>
+              <a:t>2026-04-17</a:t>
             </a:fld>
             <a:endParaRPr lang="ko-KR" altLang="en-US"/>
           </a:p>
@@ -3738,6 +3768,186 @@
 </p:sld>
 </file>
 
+<file path=ppt/slides/slide4.xml><?xml version="1.0" encoding="utf-8"?>
+<p:sld xmlns:a="http://schemas.openxmlformats.org/drawingml/2006/main" xmlns:r="http://schemas.openxmlformats.org/officeDocument/2006/relationships" xmlns:p="http://schemas.openxmlformats.org/presentationml/2006/main">
+  <p:cSld>
+    <p:spTree>
+      <p:nvGrpSpPr>
+        <p:cNvPr id="1" name=""/>
+        <p:cNvGrpSpPr/>
+        <p:nvPr/>
+      </p:nvGrpSpPr>
+      <p:grpSpPr>
+        <a:xfrm>
+          <a:off x="0" y="0"/>
+          <a:ext cx="0" cy="0"/>
+          <a:chOff x="0" y="0"/>
+          <a:chExt cx="0" cy="0"/>
+        </a:xfrm>
+      </p:grpSpPr>
+      <p:pic>
+        <p:nvPicPr>
+          <p:cNvPr id="5" name="그림 4">
+            <a:extLst>
+              <a:ext uri="{FF2B5EF4-FFF2-40B4-BE49-F238E27FC236}">
+                <a16:creationId xmlns:a16="http://schemas.microsoft.com/office/drawing/2014/main" id="{A114C2A9-1F72-D350-DDF2-3F5BC7CA8596}"/>
+              </a:ext>
+            </a:extLst>
+          </p:cNvPr>
+          <p:cNvPicPr>
+            <a:picLocks noChangeAspect="1"/>
+          </p:cNvPicPr>
+          <p:nvPr/>
+        </p:nvPicPr>
+        <p:blipFill>
+          <a:blip r:embed="rId2"/>
+          <a:stretch>
+            <a:fillRect/>
+          </a:stretch>
+        </p:blipFill>
+        <p:spPr>
+          <a:xfrm>
+            <a:off x="104775" y="160241"/>
+            <a:ext cx="4886325" cy="1276375"/>
+          </a:xfrm>
+          <a:prstGeom prst="rect">
+            <a:avLst/>
+          </a:prstGeom>
+        </p:spPr>
+      </p:pic>
+      <p:pic>
+        <p:nvPicPr>
+          <p:cNvPr id="7" name="그림 6">
+            <a:extLst>
+              <a:ext uri="{FF2B5EF4-FFF2-40B4-BE49-F238E27FC236}">
+                <a16:creationId xmlns:a16="http://schemas.microsoft.com/office/drawing/2014/main" id="{4E7A7FEE-5F6F-0D50-E344-46D996FC338C}"/>
+              </a:ext>
+            </a:extLst>
+          </p:cNvPr>
+          <p:cNvPicPr>
+            <a:picLocks noChangeAspect="1"/>
+          </p:cNvPicPr>
+          <p:nvPr/>
+        </p:nvPicPr>
+        <p:blipFill>
+          <a:blip r:embed="rId3"/>
+          <a:stretch>
+            <a:fillRect/>
+          </a:stretch>
+        </p:blipFill>
+        <p:spPr>
+          <a:xfrm>
+            <a:off x="0" y="1535690"/>
+            <a:ext cx="4991100" cy="1659328"/>
+          </a:xfrm>
+          <a:prstGeom prst="rect">
+            <a:avLst/>
+          </a:prstGeom>
+        </p:spPr>
+      </p:pic>
+      <p:pic>
+        <p:nvPicPr>
+          <p:cNvPr id="9" name="그림 8">
+            <a:extLst>
+              <a:ext uri="{FF2B5EF4-FFF2-40B4-BE49-F238E27FC236}">
+                <a16:creationId xmlns:a16="http://schemas.microsoft.com/office/drawing/2014/main" id="{3F6E3665-BC5B-83F5-63B8-10D7671AA187}"/>
+              </a:ext>
+            </a:extLst>
+          </p:cNvPr>
+          <p:cNvPicPr>
+            <a:picLocks noChangeAspect="1"/>
+          </p:cNvPicPr>
+          <p:nvPr/>
+        </p:nvPicPr>
+        <p:blipFill>
+          <a:blip r:embed="rId4"/>
+          <a:stretch>
+            <a:fillRect/>
+          </a:stretch>
+        </p:blipFill>
+        <p:spPr>
+          <a:xfrm>
+            <a:off x="0" y="3429000"/>
+            <a:ext cx="4991100" cy="1658206"/>
+          </a:xfrm>
+          <a:prstGeom prst="rect">
+            <a:avLst/>
+          </a:prstGeom>
+        </p:spPr>
+      </p:pic>
+      <p:pic>
+        <p:nvPicPr>
+          <p:cNvPr id="11" name="그림 10">
+            <a:extLst>
+              <a:ext uri="{FF2B5EF4-FFF2-40B4-BE49-F238E27FC236}">
+                <a16:creationId xmlns:a16="http://schemas.microsoft.com/office/drawing/2014/main" id="{60A4CDB8-102C-1952-4100-74C2687BC5CD}"/>
+              </a:ext>
+            </a:extLst>
+          </p:cNvPr>
+          <p:cNvPicPr>
+            <a:picLocks noChangeAspect="1"/>
+          </p:cNvPicPr>
+          <p:nvPr/>
+        </p:nvPicPr>
+        <p:blipFill>
+          <a:blip r:embed="rId5"/>
+          <a:stretch>
+            <a:fillRect/>
+          </a:stretch>
+        </p:blipFill>
+        <p:spPr>
+          <a:xfrm>
+            <a:off x="5695948" y="0"/>
+            <a:ext cx="5600702" cy="1535855"/>
+          </a:xfrm>
+          <a:prstGeom prst="rect">
+            <a:avLst/>
+          </a:prstGeom>
+        </p:spPr>
+      </p:pic>
+      <p:pic>
+        <p:nvPicPr>
+          <p:cNvPr id="13" name="그림 12">
+            <a:extLst>
+              <a:ext uri="{FF2B5EF4-FFF2-40B4-BE49-F238E27FC236}">
+                <a16:creationId xmlns:a16="http://schemas.microsoft.com/office/drawing/2014/main" id="{0142CECF-55DD-657F-D5FF-C2FB779064C2}"/>
+              </a:ext>
+            </a:extLst>
+          </p:cNvPr>
+          <p:cNvPicPr>
+            <a:picLocks noChangeAspect="1"/>
+          </p:cNvPicPr>
+          <p:nvPr/>
+        </p:nvPicPr>
+        <p:blipFill>
+          <a:blip r:embed="rId6"/>
+          <a:stretch>
+            <a:fillRect/>
+          </a:stretch>
+        </p:blipFill>
+        <p:spPr>
+          <a:xfrm>
+            <a:off x="5695948" y="1605141"/>
+            <a:ext cx="5600702" cy="1500649"/>
+          </a:xfrm>
+          <a:prstGeom prst="rect">
+            <a:avLst/>
+          </a:prstGeom>
+        </p:spPr>
+      </p:pic>
+    </p:spTree>
+    <p:extLst>
+      <p:ext uri="{BB962C8B-B14F-4D97-AF65-F5344CB8AC3E}">
+        <p14:creationId xmlns:p14="http://schemas.microsoft.com/office/powerpoint/2010/main" val="1330025071"/>
+      </p:ext>
+    </p:extLst>
+  </p:cSld>
+  <p:clrMapOvr>
+    <a:masterClrMapping/>
+  </p:clrMapOvr>
+</p:sld>
+</file>
+
 <file path=ppt/theme/theme1.xml><?xml version="1.0" encoding="utf-8"?>
 <a:theme xmlns:a="http://schemas.openxmlformats.org/drawingml/2006/main" name="Office 테마">
   <a:themeElements>
